--- a/materialien/Welt0_Antike/1_Praesentation/KR_W0_Praesentation_Kickoff.pptx
+++ b/materialien/Welt0_Antike/1_Praesentation/KR_W0_Praesentation_Kickoff.pptx
@@ -121,7 +121,7 @@
   <p:extLst>
     <p:ext uri="{521415D9-36F7-43E2-AB2F-B90AF26B5E84}">
       <p14:sectionLst xmlns:p14="http://schemas.microsoft.com/office/powerpoint/2010/main">
-        <p14:section name="Kickoff" id="{5168e12d-623b-adc7-9c4a-852448a8745f}">
+        <p14:section name="Kickoff" id="{fb8c2551-06cd-1765-5fee-d5f17e0fb82c}">
           <p14:sldIdLst>
             <p14:sldId id="256"/>
             <p14:sldId id="257"/>
@@ -134,7 +134,7 @@
             <p14:sldId id="264"/>
           </p14:sldIdLst>
         </p14:section>
-        <p14:section name="Lab" id="{4a3e2ac3-235c-4c6e-c323-8f9335468ccd}">
+        <p14:section name="Lab" id="{f273d4ee-722d-0ab1-2f41-b685b409e972}">
           <p14:sldIdLst>
             <p14:sldId id="265"/>
             <p14:sldId id="266"/>
@@ -142,7 +142,7 @@
             <p14:sldId id="268"/>
           </p14:sldIdLst>
         </p14:section>
-        <p14:section name="Einsteigen" id="{b4c3d9bf-bb4c-2e14-bf73-804711bd80ea}">
+        <p14:section name="Einsteigen" id="{c2d615ae-b1a9-c74c-cef3-aed86cf75d33}">
           <p14:sldIdLst>
             <p14:sldId id="269"/>
             <p14:sldId id="270"/>
@@ -10190,7 +10190,7 @@
                           <a:ea typeface="Consolas" pitchFamily="34" charset="-122"/>
                           <a:cs typeface="Consolas" pitchFamily="34" charset="-120"/>
                         </a:rPr>
-                        <a:t>1553</a:t>
+                        <a:t>1600</a:t>
                       </a:r>
                       <a:endParaRPr lang="en-US" sz="1800" dirty="0">
                         <a:latin typeface="Calibri" charset="0"/>
